--- a/docs/IEMOCAP_Presentation.pptx
+++ b/docs/IEMOCAP_Presentation.pptx
@@ -8865,7 +8865,7 @@
         <p:spPr>
           <a:xfrm>
             <a:off x="274320" y="4114800"/>
-            <a:ext cx="11612880" cy="1463040"/>
+            <a:ext cx="11612880" cy="1783080"/>
           </a:xfrm>
           <a:prstGeom prst="rect">
             <a:avLst/>
